--- a/dataset/guides_final/NET/manual/IT-NET-003-M_네트워크 장애 신고·이관 처리 매뉴얼.pptx
+++ b/dataset/guides_final/NET/manual/IT-NET-003-M_네트워크 장애 신고·이관 처리 매뉴얼.pptx
@@ -18443,7 +18443,7 @@
                 <a:ea typeface="Malgun Gothic"/>
                 <a:cs typeface="Malgun Gothic"/>
               </a:rPr>
-              <a:t>티켓: 담당자 조치가 필요한 건. 담당팀에 배정하고 상태를 RDY → IP → FIN → CLS 으로 관리한다.</a:t>
+              <a:t>티켓: 담당자 조치가 필요한 건. 담당팀에 배정하고 상태를 RDY → WIP → FIN → CLS 으로 관리한다.</a:t>
             </a:r>
           </a:p>
         </p:txBody>

--- a/dataset/guides_final/NET/manual/IT-NET-003-M_네트워크 장애 신고·이관 처리 매뉴얼.pptx
+++ b/dataset/guides_final/NET/manual/IT-NET-003-M_네트워크 장애 신고·이관 처리 매뉴얼.pptx
@@ -3232,7 +3232,7 @@
                 <a:ea typeface="Malgun Gothic"/>
                 <a:cs typeface="Malgun Gothic"/>
               </a:rPr>
-              <a:t>한화시스템 ICT IT 담당자 매뉴얼 · VPN·네트워크</a:t>
+              <a:t>가상 ICT 기업 IT 담당자 매뉴얼 · VPN·네트워크</a:t>
             </a:r>
           </a:p>
         </p:txBody>
@@ -3511,7 +3511,7 @@
                 <a:ea typeface="Malgun Gothic"/>
                 <a:cs typeface="Malgun Gothic"/>
               </a:rPr>
-              <a:t>© HANWHA SYSTEMS ICT · IT-NET-003-M · 사내 제한</a:t>
+              <a:t>© 가상 ICT 기업 · IT-NET-003-M · 사내 제한</a:t>
             </a:r>
           </a:p>
         </p:txBody>
@@ -4616,7 +4616,7 @@
                 <a:ea typeface="Malgun Gothic"/>
                 <a:cs typeface="Malgun Gothic"/>
               </a:rPr>
-              <a:t>© HANWHA SYSTEMS ICT · IT-NET-003-M · 사내 제한</a:t>
+              <a:t>© 가상 ICT 기업 · IT-NET-003-M · 사내 제한</a:t>
             </a:r>
           </a:p>
         </p:txBody>
@@ -7091,7 +7091,7 @@
                 <a:ea typeface="Malgun Gothic"/>
                 <a:cs typeface="Malgun Gothic"/>
               </a:rPr>
-              <a:t>© HANWHA SYSTEMS ICT · IT-NET-003-M · 사내 제한</a:t>
+              <a:t>© 가상 ICT 기업 · IT-NET-003-M · 사내 제한</a:t>
             </a:r>
           </a:p>
         </p:txBody>
@@ -8290,7 +8290,7 @@
                 <a:ea typeface="Malgun Gothic"/>
                 <a:cs typeface="Malgun Gothic"/>
               </a:rPr>
-              <a:t>© HANWHA SYSTEMS ICT · IT-NET-003-M · 사내 제한</a:t>
+              <a:t>© 가상 ICT 기업 · IT-NET-003-M · 사내 제한</a:t>
             </a:r>
           </a:p>
         </p:txBody>
@@ -8538,7 +8538,7 @@
                 <a:ea typeface="Malgun Gothic"/>
                 <a:cs typeface="Malgun Gothic"/>
               </a:rPr>
-              <a:t>© HANWHA SYSTEMS ICT · IT-NET-003-M · 사내 제한</a:t>
+              <a:t>© 가상 ICT 기업 · IT-NET-003-M · 사내 제한</a:t>
             </a:r>
           </a:p>
         </p:txBody>
@@ -9221,7 +9221,7 @@
                 <a:ea typeface="Malgun Gothic"/>
                 <a:cs typeface="Malgun Gothic"/>
               </a:rPr>
-              <a:t>© HANWHA SYSTEMS ICT · IT-NET-003-M · 사내 제한</a:t>
+              <a:t>© 가상 ICT 기업 · IT-NET-003-M · 사내 제한</a:t>
             </a:r>
           </a:p>
         </p:txBody>
@@ -9469,7 +9469,7 @@
                 <a:ea typeface="Malgun Gothic"/>
                 <a:cs typeface="Malgun Gothic"/>
               </a:rPr>
-              <a:t>© HANWHA SYSTEMS ICT · IT-NET-003-M · 사내 제한</a:t>
+              <a:t>© 가상 ICT 기업 · IT-NET-003-M · 사내 제한</a:t>
             </a:r>
           </a:p>
         </p:txBody>
@@ -10497,7 +10497,7 @@
                 <a:ea typeface="Malgun Gothic"/>
                 <a:cs typeface="Malgun Gothic"/>
               </a:rPr>
-              <a:t>© HANWHA SYSTEMS ICT · IT-NET-003-M · 사내 제한</a:t>
+              <a:t>© 가상 ICT 기업 · IT-NET-003-M · 사내 제한</a:t>
             </a:r>
           </a:p>
         </p:txBody>
@@ -10745,7 +10745,7 @@
                 <a:ea typeface="Malgun Gothic"/>
                 <a:cs typeface="Malgun Gothic"/>
               </a:rPr>
-              <a:t>© HANWHA SYSTEMS ICT · IT-NET-003-M · 사내 제한</a:t>
+              <a:t>© 가상 ICT 기업 · IT-NET-003-M · 사내 제한</a:t>
             </a:r>
           </a:p>
         </p:txBody>
@@ -11549,7 +11549,7 @@
                 <a:ea typeface="Malgun Gothic"/>
                 <a:cs typeface="Malgun Gothic"/>
               </a:rPr>
-              <a:t>© HANWHA SYSTEMS ICT · IT-NET-003-M · 사내 제한</a:t>
+              <a:t>© 가상 ICT 기업 · IT-NET-003-M · 사내 제한</a:t>
             </a:r>
           </a:p>
         </p:txBody>
@@ -12526,7 +12526,7 @@
                 <a:ea typeface="Malgun Gothic"/>
                 <a:cs typeface="Malgun Gothic"/>
               </a:rPr>
-              <a:t>© HANWHA SYSTEMS ICT · IT-NET-003-M · 사내 제한</a:t>
+              <a:t>© 가상 ICT 기업 · IT-NET-003-M · 사내 제한</a:t>
             </a:r>
           </a:p>
         </p:txBody>
@@ -14169,7 +14169,7 @@
                 <a:ea typeface="Malgun Gothic"/>
                 <a:cs typeface="Malgun Gothic"/>
               </a:rPr>
-              <a:t>© HANWHA SYSTEMS ICT · IT-NET-003-M · 사내 제한</a:t>
+              <a:t>© 가상 ICT 기업 · IT-NET-003-M · 사내 제한</a:t>
             </a:r>
           </a:p>
         </p:txBody>
@@ -15315,7 +15315,7 @@
                 <a:ea typeface="Malgun Gothic"/>
                 <a:cs typeface="Malgun Gothic"/>
               </a:rPr>
-              <a:t>© HANWHA SYSTEMS ICT · IT-NET-003-M · 사내 제한</a:t>
+              <a:t>© 가상 ICT 기업 · IT-NET-003-M · 사내 제한</a:t>
             </a:r>
           </a:p>
         </p:txBody>
@@ -15563,7 +15563,7 @@
                 <a:ea typeface="Malgun Gothic"/>
                 <a:cs typeface="Malgun Gothic"/>
               </a:rPr>
-              <a:t>© HANWHA SYSTEMS ICT · IT-NET-003-M · 사내 제한</a:t>
+              <a:t>© 가상 ICT 기업 · IT-NET-003-M · 사내 제한</a:t>
             </a:r>
           </a:p>
         </p:txBody>
@@ -16485,7 +16485,7 @@
                 <a:ea typeface="Malgun Gothic"/>
                 <a:cs typeface="Malgun Gothic"/>
               </a:rPr>
-              <a:t>© HANWHA SYSTEMS ICT · IT-NET-003-M · 사내 제한</a:t>
+              <a:t>© 가상 ICT 기업 · IT-NET-003-M · 사내 제한</a:t>
             </a:r>
           </a:p>
         </p:txBody>
@@ -16733,7 +16733,7 @@
                 <a:ea typeface="Malgun Gothic"/>
                 <a:cs typeface="Malgun Gothic"/>
               </a:rPr>
-              <a:t>© HANWHA SYSTEMS ICT · IT-NET-003-M · 사내 제한</a:t>
+              <a:t>© 가상 ICT 기업 · IT-NET-003-M · 사내 제한</a:t>
             </a:r>
           </a:p>
         </p:txBody>
@@ -18819,7 +18819,7 @@
                 <a:ea typeface="Malgun Gothic"/>
                 <a:cs typeface="Malgun Gothic"/>
               </a:rPr>
-              <a:t>© HANWHA SYSTEMS ICT · IT-NET-003-M · 사내 제한</a:t>
+              <a:t>© 가상 ICT 기업 · IT-NET-003-M · 사내 제한</a:t>
             </a:r>
           </a:p>
         </p:txBody>
@@ -19067,7 +19067,7 @@
                 <a:ea typeface="Malgun Gothic"/>
                 <a:cs typeface="Malgun Gothic"/>
               </a:rPr>
-              <a:t>© HANWHA SYSTEMS ICT · IT-NET-003-M · 사내 제한</a:t>
+              <a:t>© 가상 ICT 기업 · IT-NET-003-M · 사내 제한</a:t>
             </a:r>
           </a:p>
         </p:txBody>
@@ -21590,7 +21590,7 @@
                 <a:ea typeface="Malgun Gothic"/>
                 <a:cs typeface="Malgun Gothic"/>
               </a:rPr>
-              <a:t>© HANWHA SYSTEMS ICT · IT-NET-003-M · 사내 제한</a:t>
+              <a:t>© 가상 ICT 기업 · IT-NET-003-M · 사내 제한</a:t>
             </a:r>
           </a:p>
         </p:txBody>
